--- a/public/fun/cards/finance/finance-36.pptx
+++ b/public/fun/cards/finance/finance-36.pptx
@@ -3085,7 +3085,7 @@
     <p:bg>
       <p:bgPr>
         <a:solidFill>
-          <a:srgbClr val="756110"/>
+          <a:srgbClr val="0E1116"/>
         </a:solidFill>
         <a:effectLst/>
       </p:bgPr>
@@ -3099,20 +3099,20 @@
       <p:grpSpPr/>
       <p:sp>
         <p:nvSpPr>
-          <p:cNvPr id="2" name="Rectangle 1"/>
+          <p:cNvPr id="2" name="Oval 1"/>
           <p:cNvSpPr/>
           <p:nvPr/>
         </p:nvSpPr>
         <p:spPr>
           <a:xfrm>
-            <a:off x="0" y="1339200"/>
-            <a:ext cx="3240000" cy="460800"/>
-          </a:xfrm>
-          <a:prstGeom prst="rect">
+            <a:off x="2646000" y="234000"/>
+            <a:ext cx="36000" cy="36000"/>
+          </a:xfrm>
+          <a:prstGeom prst="ellipse">
             <a:avLst/>
           </a:prstGeom>
           <a:solidFill>
-            <a:srgbClr val="DCC35C"/>
+            <a:srgbClr val="6D7695"/>
           </a:solidFill>
           <a:ln>
             <a:noFill/>
@@ -3128,47 +3128,20 @@
       </p:sp>
       <p:sp>
         <p:nvSpPr>
-          <p:cNvPr id="3" name="Freeform 2"/>
+          <p:cNvPr id="3" name="Oval 2"/>
           <p:cNvSpPr/>
           <p:nvPr/>
         </p:nvSpPr>
         <p:spPr>
           <a:xfrm>
-            <a:off x="2745360" y="249840"/>
-            <a:ext cx="269280" cy="356400"/>
-          </a:xfrm>
-          <a:custGeom>
+            <a:off x="2646000" y="334800"/>
+            <a:ext cx="36000" cy="36000"/>
+          </a:xfrm>
+          <a:prstGeom prst="ellipse">
             <a:avLst/>
-            <a:gdLst/>
-            <a:ahLst/>
-            <a:cxnLst/>
-            <a:rect l="l" t="t" r="r" b="b"/>
-            <a:pathLst>
-              <a:path w="269280" h="356400">
-                <a:moveTo>
-                  <a:pt x="0" y="39600"/>
-                </a:moveTo>
-                <a:lnTo>
-                  <a:pt x="134640" y="0"/>
-                </a:lnTo>
-                <a:lnTo>
-                  <a:pt x="269280" y="39600"/>
-                </a:lnTo>
-                <a:lnTo>
-                  <a:pt x="269280" y="190080"/>
-                </a:lnTo>
-                <a:lnTo>
-                  <a:pt x="134640" y="356400"/>
-                </a:lnTo>
-                <a:lnTo>
-                  <a:pt x="0" y="190080"/>
-                </a:lnTo>
-                <a:close/>
-              </a:path>
-            </a:pathLst>
-          </a:custGeom>
+          </a:prstGeom>
           <a:solidFill>
-            <a:srgbClr val="DCC35C"/>
+            <a:srgbClr val="26292D"/>
           </a:solidFill>
           <a:ln>
             <a:noFill/>
@@ -3182,58 +3155,538 @@
           </a:p>
         </p:txBody>
       </p:sp>
-      <p:cxnSp>
-        <p:nvCxnSpPr>
-          <p:cNvPr id="4" name="Connector 3"/>
-          <p:cNvCxnSpPr/>
+      <p:sp>
+        <p:nvSpPr>
+          <p:cNvPr id="4" name="Oval 3"/>
+          <p:cNvSpPr/>
           <p:nvPr/>
-        </p:nvCxnSpPr>
-        <p:spPr>
-          <a:xfrm>
-            <a:off x="2824560" y="432000"/>
-            <a:ext cx="43560" cy="47520"/>
-          </a:xfrm>
-          <a:prstGeom prst="line">
+        </p:nvSpPr>
+        <p:spPr>
+          <a:xfrm>
+            <a:off x="2646000" y="435600"/>
+            <a:ext cx="36000" cy="36000"/>
+          </a:xfrm>
+          <a:prstGeom prst="ellipse">
             <a:avLst/>
           </a:prstGeom>
-          <a:ln w="27720">
-            <a:solidFill>
-              <a:srgbClr val="8B7A36"/>
-            </a:solidFill>
+          <a:solidFill>
+            <a:srgbClr val="26292D"/>
+          </a:solidFill>
+          <a:ln>
+            <a:noFill/>
           </a:ln>
         </p:spPr>
-      </p:cxnSp>
-      <p:cxnSp>
-        <p:nvCxnSpPr>
-          <p:cNvPr id="5" name="Connector 4"/>
-          <p:cNvCxnSpPr/>
+        <p:txBody>
+          <a:bodyPr rtlCol="0" anchor="ctr"/>
+          <a:lstStyle/>
+          <a:p>
+            <a:pPr algn="ctr"/>
+          </a:p>
+        </p:txBody>
+      </p:sp>
+      <p:sp>
+        <p:nvSpPr>
+          <p:cNvPr id="5" name="Oval 4"/>
+          <p:cNvSpPr/>
           <p:nvPr/>
-        </p:nvCxnSpPr>
-        <p:spPr>
-          <a:xfrm flipV="1">
-            <a:off x="2868120" y="384480"/>
-            <a:ext cx="75240" cy="95040"/>
-          </a:xfrm>
-          <a:prstGeom prst="line">
+        </p:nvSpPr>
+        <p:spPr>
+          <a:xfrm>
+            <a:off x="2646000" y="536400"/>
+            <a:ext cx="36000" cy="36000"/>
+          </a:xfrm>
+          <a:prstGeom prst="ellipse">
             <a:avLst/>
           </a:prstGeom>
-          <a:ln w="27720">
-            <a:solidFill>
-              <a:srgbClr val="8B7A36"/>
-            </a:solidFill>
+          <a:solidFill>
+            <a:srgbClr val="6D7695"/>
+          </a:solidFill>
+          <a:ln>
+            <a:noFill/>
           </a:ln>
         </p:spPr>
-      </p:cxnSp>
-      <p:sp>
-        <p:nvSpPr>
-          <p:cNvPr id="6" name="텍스트"/>
+        <p:txBody>
+          <a:bodyPr rtlCol="0" anchor="ctr"/>
+          <a:lstStyle/>
+          <a:p>
+            <a:pPr algn="ctr"/>
+          </a:p>
+        </p:txBody>
+      </p:sp>
+      <p:sp>
+        <p:nvSpPr>
+          <p:cNvPr id="6" name="Oval 5"/>
+          <p:cNvSpPr/>
+          <p:nvPr/>
+        </p:nvSpPr>
+        <p:spPr>
+          <a:xfrm>
+            <a:off x="2746800" y="234000"/>
+            <a:ext cx="36000" cy="36000"/>
+          </a:xfrm>
+          <a:prstGeom prst="ellipse">
+            <a:avLst/>
+          </a:prstGeom>
+          <a:solidFill>
+            <a:srgbClr val="26292D"/>
+          </a:solidFill>
+          <a:ln>
+            <a:noFill/>
+          </a:ln>
+        </p:spPr>
+        <p:txBody>
+          <a:bodyPr rtlCol="0" anchor="ctr"/>
+          <a:lstStyle/>
+          <a:p>
+            <a:pPr algn="ctr"/>
+          </a:p>
+        </p:txBody>
+      </p:sp>
+      <p:sp>
+        <p:nvSpPr>
+          <p:cNvPr id="7" name="Oval 6"/>
+          <p:cNvSpPr/>
+          <p:nvPr/>
+        </p:nvSpPr>
+        <p:spPr>
+          <a:xfrm>
+            <a:off x="2746800" y="334800"/>
+            <a:ext cx="36000" cy="36000"/>
+          </a:xfrm>
+          <a:prstGeom prst="ellipse">
+            <a:avLst/>
+          </a:prstGeom>
+          <a:solidFill>
+            <a:srgbClr val="26292D"/>
+          </a:solidFill>
+          <a:ln>
+            <a:noFill/>
+          </a:ln>
+        </p:spPr>
+        <p:txBody>
+          <a:bodyPr rtlCol="0" anchor="ctr"/>
+          <a:lstStyle/>
+          <a:p>
+            <a:pPr algn="ctr"/>
+          </a:p>
+        </p:txBody>
+      </p:sp>
+      <p:sp>
+        <p:nvSpPr>
+          <p:cNvPr id="8" name="Oval 7"/>
+          <p:cNvSpPr/>
+          <p:nvPr/>
+        </p:nvSpPr>
+        <p:spPr>
+          <a:xfrm>
+            <a:off x="2746800" y="435600"/>
+            <a:ext cx="36000" cy="36000"/>
+          </a:xfrm>
+          <a:prstGeom prst="ellipse">
+            <a:avLst/>
+          </a:prstGeom>
+          <a:solidFill>
+            <a:srgbClr val="6D7695"/>
+          </a:solidFill>
+          <a:ln>
+            <a:noFill/>
+          </a:ln>
+        </p:spPr>
+        <p:txBody>
+          <a:bodyPr rtlCol="0" anchor="ctr"/>
+          <a:lstStyle/>
+          <a:p>
+            <a:pPr algn="ctr"/>
+          </a:p>
+        </p:txBody>
+      </p:sp>
+      <p:sp>
+        <p:nvSpPr>
+          <p:cNvPr id="9" name="Oval 8"/>
+          <p:cNvSpPr/>
+          <p:nvPr/>
+        </p:nvSpPr>
+        <p:spPr>
+          <a:xfrm>
+            <a:off x="2746800" y="536400"/>
+            <a:ext cx="36000" cy="36000"/>
+          </a:xfrm>
+          <a:prstGeom prst="ellipse">
+            <a:avLst/>
+          </a:prstGeom>
+          <a:solidFill>
+            <a:srgbClr val="26292D"/>
+          </a:solidFill>
+          <a:ln>
+            <a:noFill/>
+          </a:ln>
+        </p:spPr>
+        <p:txBody>
+          <a:bodyPr rtlCol="0" anchor="ctr"/>
+          <a:lstStyle/>
+          <a:p>
+            <a:pPr algn="ctr"/>
+          </a:p>
+        </p:txBody>
+      </p:sp>
+      <p:sp>
+        <p:nvSpPr>
+          <p:cNvPr id="10" name="Oval 9"/>
+          <p:cNvSpPr/>
+          <p:nvPr/>
+        </p:nvSpPr>
+        <p:spPr>
+          <a:xfrm>
+            <a:off x="2847600" y="234000"/>
+            <a:ext cx="36000" cy="36000"/>
+          </a:xfrm>
+          <a:prstGeom prst="ellipse">
+            <a:avLst/>
+          </a:prstGeom>
+          <a:solidFill>
+            <a:srgbClr val="26292D"/>
+          </a:solidFill>
+          <a:ln>
+            <a:noFill/>
+          </a:ln>
+        </p:spPr>
+        <p:txBody>
+          <a:bodyPr rtlCol="0" anchor="ctr"/>
+          <a:lstStyle/>
+          <a:p>
+            <a:pPr algn="ctr"/>
+          </a:p>
+        </p:txBody>
+      </p:sp>
+      <p:sp>
+        <p:nvSpPr>
+          <p:cNvPr id="11" name="Oval 10"/>
+          <p:cNvSpPr/>
+          <p:nvPr/>
+        </p:nvSpPr>
+        <p:spPr>
+          <a:xfrm>
+            <a:off x="2847600" y="334800"/>
+            <a:ext cx="36000" cy="36000"/>
+          </a:xfrm>
+          <a:prstGeom prst="ellipse">
+            <a:avLst/>
+          </a:prstGeom>
+          <a:solidFill>
+            <a:srgbClr val="6D7695"/>
+          </a:solidFill>
+          <a:ln>
+            <a:noFill/>
+          </a:ln>
+        </p:spPr>
+        <p:txBody>
+          <a:bodyPr rtlCol="0" anchor="ctr"/>
+          <a:lstStyle/>
+          <a:p>
+            <a:pPr algn="ctr"/>
+          </a:p>
+        </p:txBody>
+      </p:sp>
+      <p:sp>
+        <p:nvSpPr>
+          <p:cNvPr id="12" name="Oval 11"/>
+          <p:cNvSpPr/>
+          <p:nvPr/>
+        </p:nvSpPr>
+        <p:spPr>
+          <a:xfrm>
+            <a:off x="2847600" y="435600"/>
+            <a:ext cx="36000" cy="36000"/>
+          </a:xfrm>
+          <a:prstGeom prst="ellipse">
+            <a:avLst/>
+          </a:prstGeom>
+          <a:solidFill>
+            <a:srgbClr val="26292D"/>
+          </a:solidFill>
+          <a:ln>
+            <a:noFill/>
+          </a:ln>
+        </p:spPr>
+        <p:txBody>
+          <a:bodyPr rtlCol="0" anchor="ctr"/>
+          <a:lstStyle/>
+          <a:p>
+            <a:pPr algn="ctr"/>
+          </a:p>
+        </p:txBody>
+      </p:sp>
+      <p:sp>
+        <p:nvSpPr>
+          <p:cNvPr id="13" name="Oval 12"/>
+          <p:cNvSpPr/>
+          <p:nvPr/>
+        </p:nvSpPr>
+        <p:spPr>
+          <a:xfrm>
+            <a:off x="2847600" y="536400"/>
+            <a:ext cx="36000" cy="36000"/>
+          </a:xfrm>
+          <a:prstGeom prst="ellipse">
+            <a:avLst/>
+          </a:prstGeom>
+          <a:solidFill>
+            <a:srgbClr val="26292D"/>
+          </a:solidFill>
+          <a:ln>
+            <a:noFill/>
+          </a:ln>
+        </p:spPr>
+        <p:txBody>
+          <a:bodyPr rtlCol="0" anchor="ctr"/>
+          <a:lstStyle/>
+          <a:p>
+            <a:pPr algn="ctr"/>
+          </a:p>
+        </p:txBody>
+      </p:sp>
+      <p:sp>
+        <p:nvSpPr>
+          <p:cNvPr id="14" name="Oval 13"/>
+          <p:cNvSpPr/>
+          <p:nvPr/>
+        </p:nvSpPr>
+        <p:spPr>
+          <a:xfrm>
+            <a:off x="2948400" y="234000"/>
+            <a:ext cx="36000" cy="36000"/>
+          </a:xfrm>
+          <a:prstGeom prst="ellipse">
+            <a:avLst/>
+          </a:prstGeom>
+          <a:solidFill>
+            <a:srgbClr val="6D7695"/>
+          </a:solidFill>
+          <a:ln>
+            <a:noFill/>
+          </a:ln>
+        </p:spPr>
+        <p:txBody>
+          <a:bodyPr rtlCol="0" anchor="ctr"/>
+          <a:lstStyle/>
+          <a:p>
+            <a:pPr algn="ctr"/>
+          </a:p>
+        </p:txBody>
+      </p:sp>
+      <p:sp>
+        <p:nvSpPr>
+          <p:cNvPr id="15" name="Oval 14"/>
+          <p:cNvSpPr/>
+          <p:nvPr/>
+        </p:nvSpPr>
+        <p:spPr>
+          <a:xfrm>
+            <a:off x="2948400" y="334800"/>
+            <a:ext cx="36000" cy="36000"/>
+          </a:xfrm>
+          <a:prstGeom prst="ellipse">
+            <a:avLst/>
+          </a:prstGeom>
+          <a:solidFill>
+            <a:srgbClr val="26292D"/>
+          </a:solidFill>
+          <a:ln>
+            <a:noFill/>
+          </a:ln>
+        </p:spPr>
+        <p:txBody>
+          <a:bodyPr rtlCol="0" anchor="ctr"/>
+          <a:lstStyle/>
+          <a:p>
+            <a:pPr algn="ctr"/>
+          </a:p>
+        </p:txBody>
+      </p:sp>
+      <p:sp>
+        <p:nvSpPr>
+          <p:cNvPr id="16" name="Oval 15"/>
+          <p:cNvSpPr/>
+          <p:nvPr/>
+        </p:nvSpPr>
+        <p:spPr>
+          <a:xfrm>
+            <a:off x="2948400" y="435600"/>
+            <a:ext cx="36000" cy="36000"/>
+          </a:xfrm>
+          <a:prstGeom prst="ellipse">
+            <a:avLst/>
+          </a:prstGeom>
+          <a:solidFill>
+            <a:srgbClr val="26292D"/>
+          </a:solidFill>
+          <a:ln>
+            <a:noFill/>
+          </a:ln>
+        </p:spPr>
+        <p:txBody>
+          <a:bodyPr rtlCol="0" anchor="ctr"/>
+          <a:lstStyle/>
+          <a:p>
+            <a:pPr algn="ctr"/>
+          </a:p>
+        </p:txBody>
+      </p:sp>
+      <p:sp>
+        <p:nvSpPr>
+          <p:cNvPr id="17" name="Oval 16"/>
+          <p:cNvSpPr/>
+          <p:nvPr/>
+        </p:nvSpPr>
+        <p:spPr>
+          <a:xfrm>
+            <a:off x="2948400" y="536400"/>
+            <a:ext cx="36000" cy="36000"/>
+          </a:xfrm>
+          <a:prstGeom prst="ellipse">
+            <a:avLst/>
+          </a:prstGeom>
+          <a:solidFill>
+            <a:srgbClr val="6D7695"/>
+          </a:solidFill>
+          <a:ln>
+            <a:noFill/>
+          </a:ln>
+        </p:spPr>
+        <p:txBody>
+          <a:bodyPr rtlCol="0" anchor="ctr"/>
+          <a:lstStyle/>
+          <a:p>
+            <a:pPr algn="ctr"/>
+          </a:p>
+        </p:txBody>
+      </p:sp>
+      <p:sp>
+        <p:nvSpPr>
+          <p:cNvPr id="18" name="Oval 17"/>
+          <p:cNvSpPr/>
+          <p:nvPr/>
+        </p:nvSpPr>
+        <p:spPr>
+          <a:xfrm>
+            <a:off x="3049200" y="234000"/>
+            <a:ext cx="36000" cy="36000"/>
+          </a:xfrm>
+          <a:prstGeom prst="ellipse">
+            <a:avLst/>
+          </a:prstGeom>
+          <a:solidFill>
+            <a:srgbClr val="26292D"/>
+          </a:solidFill>
+          <a:ln>
+            <a:noFill/>
+          </a:ln>
+        </p:spPr>
+        <p:txBody>
+          <a:bodyPr rtlCol="0" anchor="ctr"/>
+          <a:lstStyle/>
+          <a:p>
+            <a:pPr algn="ctr"/>
+          </a:p>
+        </p:txBody>
+      </p:sp>
+      <p:sp>
+        <p:nvSpPr>
+          <p:cNvPr id="19" name="Oval 18"/>
+          <p:cNvSpPr/>
+          <p:nvPr/>
+        </p:nvSpPr>
+        <p:spPr>
+          <a:xfrm>
+            <a:off x="3049200" y="334800"/>
+            <a:ext cx="36000" cy="36000"/>
+          </a:xfrm>
+          <a:prstGeom prst="ellipse">
+            <a:avLst/>
+          </a:prstGeom>
+          <a:solidFill>
+            <a:srgbClr val="26292D"/>
+          </a:solidFill>
+          <a:ln>
+            <a:noFill/>
+          </a:ln>
+        </p:spPr>
+        <p:txBody>
+          <a:bodyPr rtlCol="0" anchor="ctr"/>
+          <a:lstStyle/>
+          <a:p>
+            <a:pPr algn="ctr"/>
+          </a:p>
+        </p:txBody>
+      </p:sp>
+      <p:sp>
+        <p:nvSpPr>
+          <p:cNvPr id="20" name="Oval 19"/>
+          <p:cNvSpPr/>
+          <p:nvPr/>
+        </p:nvSpPr>
+        <p:spPr>
+          <a:xfrm>
+            <a:off x="3049200" y="435600"/>
+            <a:ext cx="36000" cy="36000"/>
+          </a:xfrm>
+          <a:prstGeom prst="ellipse">
+            <a:avLst/>
+          </a:prstGeom>
+          <a:solidFill>
+            <a:srgbClr val="6D7695"/>
+          </a:solidFill>
+          <a:ln>
+            <a:noFill/>
+          </a:ln>
+        </p:spPr>
+        <p:txBody>
+          <a:bodyPr rtlCol="0" anchor="ctr"/>
+          <a:lstStyle/>
+          <a:p>
+            <a:pPr algn="ctr"/>
+          </a:p>
+        </p:txBody>
+      </p:sp>
+      <p:sp>
+        <p:nvSpPr>
+          <p:cNvPr id="21" name="Oval 20"/>
+          <p:cNvSpPr/>
+          <p:nvPr/>
+        </p:nvSpPr>
+        <p:spPr>
+          <a:xfrm>
+            <a:off x="3049200" y="536400"/>
+            <a:ext cx="36000" cy="36000"/>
+          </a:xfrm>
+          <a:prstGeom prst="ellipse">
+            <a:avLst/>
+          </a:prstGeom>
+          <a:solidFill>
+            <a:srgbClr val="26292D"/>
+          </a:solidFill>
+          <a:ln>
+            <a:noFill/>
+          </a:ln>
+        </p:spPr>
+        <p:txBody>
+          <a:bodyPr rtlCol="0" anchor="ctr"/>
+          <a:lstStyle/>
+          <a:p>
+            <a:pPr algn="ctr"/>
+          </a:p>
+        </p:txBody>
+      </p:sp>
+      <p:sp>
+        <p:nvSpPr>
+          <p:cNvPr id="22" name="텍스트"/>
           <p:cNvSpPr txBox="1"/>
           <p:nvPr/>
         </p:nvSpPr>
         <p:spPr>
           <a:xfrm>
-            <a:off x="216000" y="230400"/>
-            <a:ext cx="2160000" cy="313692"/>
+            <a:off x="252000" y="223200"/>
+            <a:ext cx="1440000" cy="133351"/>
           </a:xfrm>
           <a:prstGeom prst="rect">
             <a:avLst/>
@@ -3248,11 +3701,51 @@
           <a:p>
             <a:pPr algn="l">
               <a:lnSpc>
-                <a:spcPts val="2755"/>
+                <a:spcPts val="1015"/>
               </a:lnSpc>
             </a:pPr>
             <a:r>
-              <a:rPr sz="1900" b="1" spc="50">
+              <a:rPr sz="700" b="1" spc="200">
+                <a:solidFill>
+                  <a:srgbClr val="A3A9B5"/>
+                </a:solidFill>
+                <a:latin typeface="맑은 고딕"/>
+                <a:ea typeface="맑은 고딕"/>
+              </a:rPr>
+              <a:t>회사 · 사무소 이름</a:t>
+            </a:r>
+          </a:p>
+        </p:txBody>
+      </p:sp>
+      <p:sp>
+        <p:nvSpPr>
+          <p:cNvPr id="23" name="텍스트"/>
+          <p:cNvSpPr txBox="1"/>
+          <p:nvPr/>
+        </p:nvSpPr>
+        <p:spPr>
+          <a:xfrm>
+            <a:off x="252000" y="770400"/>
+            <a:ext cx="2016000" cy="360000"/>
+          </a:xfrm>
+          <a:prstGeom prst="rect">
+            <a:avLst/>
+          </a:prstGeom>
+          <a:noFill/>
+        </p:spPr>
+        <p:txBody>
+          <a:bodyPr wrap="square" lIns="0" rIns="0" tIns="0" bIns="0" anchor="t">
+            <a:spAutoFit/>
+          </a:bodyPr>
+          <a:lstStyle/>
+          <a:p>
+            <a:pPr algn="l">
+              <a:lnSpc>
+                <a:spcPts val="3190"/>
+              </a:lnSpc>
+            </a:pPr>
+            <a:r>
+              <a:rPr sz="2200" b="1">
                 <a:solidFill>
                   <a:srgbClr val="FFFFFF"/>
                 </a:solidFill>
@@ -3266,14 +3759,14 @@
       </p:sp>
       <p:sp>
         <p:nvSpPr>
-          <p:cNvPr id="7" name="텍스트"/>
+          <p:cNvPr id="24" name="텍스트"/>
           <p:cNvSpPr txBox="1"/>
           <p:nvPr/>
         </p:nvSpPr>
         <p:spPr>
           <a:xfrm>
-            <a:off x="216000" y="525600"/>
-            <a:ext cx="2160000" cy="122400"/>
+            <a:off x="252000" y="1173600"/>
+            <a:ext cx="2016000" cy="171451"/>
           </a:xfrm>
           <a:prstGeom prst="rect">
             <a:avLst/>
@@ -3288,13 +3781,13 @@
           <a:p>
             <a:pPr algn="l">
               <a:lnSpc>
-                <a:spcPts val="1232"/>
+                <a:spcPts val="1305"/>
               </a:lnSpc>
             </a:pPr>
             <a:r>
-              <a:rPr sz="850" b="1">
+              <a:rPr sz="900" b="0">
                 <a:solidFill>
-                  <a:srgbClr val="EEE1AE"/>
+                  <a:srgbClr val="A3A9B5"/>
                 </a:solidFill>
                 <a:latin typeface="맑은 고딕"/>
                 <a:ea typeface="맑은 고딕"/>
@@ -3306,14 +3799,14 @@
       </p:sp>
       <p:sp>
         <p:nvSpPr>
-          <p:cNvPr id="8" name="텍스트"/>
+          <p:cNvPr id="25" name="텍스트"/>
           <p:cNvSpPr txBox="1"/>
           <p:nvPr/>
         </p:nvSpPr>
         <p:spPr>
           <a:xfrm>
-            <a:off x="216000" y="770400"/>
-            <a:ext cx="2160000" cy="100800"/>
+            <a:off x="1620000" y="1339200"/>
+            <a:ext cx="1368000" cy="133351"/>
           </a:xfrm>
           <a:prstGeom prst="rect">
             <a:avLst/>
@@ -3326,95 +3819,15 @@
           </a:bodyPr>
           <a:lstStyle/>
           <a:p>
-            <a:pPr algn="l">
-              <a:lnSpc>
-                <a:spcPts val="1087"/>
-              </a:lnSpc>
-            </a:pPr>
-            <a:r>
-              <a:rPr sz="750" b="1" spc="150">
-                <a:solidFill>
-                  <a:srgbClr val="E5E1D1"/>
-                </a:solidFill>
-                <a:latin typeface="맑은 고딕"/>
-                <a:ea typeface="맑은 고딕"/>
-              </a:rPr>
-              <a:t>회사 · 사무소 이름</a:t>
-            </a:r>
-          </a:p>
-        </p:txBody>
-      </p:sp>
-      <p:sp>
-        <p:nvSpPr>
-          <p:cNvPr id="9" name="텍스트"/>
-          <p:cNvSpPr txBox="1"/>
-          <p:nvPr/>
-        </p:nvSpPr>
-        <p:spPr>
-          <a:xfrm>
-            <a:off x="216000" y="1432800"/>
-            <a:ext cx="122400" cy="108000"/>
-          </a:xfrm>
-          <a:prstGeom prst="rect">
-            <a:avLst/>
-          </a:prstGeom>
-          <a:noFill/>
-        </p:spPr>
-        <p:txBody>
-          <a:bodyPr wrap="square" lIns="0" rIns="0" tIns="0" bIns="0" anchor="t">
-            <a:spAutoFit/>
-          </a:bodyPr>
-          <a:lstStyle/>
-          <a:p>
-            <a:pPr algn="l">
+            <a:pPr algn="r">
               <a:lnSpc>
                 <a:spcPts val="1015"/>
               </a:lnSpc>
             </a:pPr>
             <a:r>
-              <a:rPr sz="700" b="1">
-                <a:solidFill>
-                  <a:srgbClr val="4D4D4D"/>
-                </a:solidFill>
-                <a:latin typeface="맑은 고딕"/>
-                <a:ea typeface="맑은 고딕"/>
-              </a:rPr>
-              <a:t>T</a:t>
-            </a:r>
-          </a:p>
-        </p:txBody>
-      </p:sp>
-      <p:sp>
-        <p:nvSpPr>
-          <p:cNvPr id="10" name="텍스트"/>
-          <p:cNvSpPr txBox="1"/>
-          <p:nvPr/>
-        </p:nvSpPr>
-        <p:spPr>
-          <a:xfrm>
-            <a:off x="360000" y="1432800"/>
-            <a:ext cx="1368000" cy="108000"/>
-          </a:xfrm>
-          <a:prstGeom prst="rect">
-            <a:avLst/>
-          </a:prstGeom>
-          <a:noFill/>
-        </p:spPr>
-        <p:txBody>
-          <a:bodyPr wrap="square" lIns="0" rIns="0" tIns="0" bIns="0" anchor="t">
-            <a:spAutoFit/>
-          </a:bodyPr>
-          <a:lstStyle/>
-          <a:p>
-            <a:pPr algn="l">
-              <a:lnSpc>
-                <a:spcPts val="1015"/>
-              </a:lnSpc>
-            </a:pPr>
-            <a:r>
               <a:rPr sz="700" b="0">
                 <a:solidFill>
-                  <a:srgbClr val="4D4D4D"/>
+                  <a:srgbClr val="FFFFFF"/>
                 </a:solidFill>
                 <a:latin typeface="맑은 고딕"/>
                 <a:ea typeface="맑은 고딕"/>
@@ -3426,14 +3839,14 @@
       </p:sp>
       <p:sp>
         <p:nvSpPr>
-          <p:cNvPr id="11" name="텍스트"/>
+          <p:cNvPr id="26" name="텍스트"/>
           <p:cNvSpPr txBox="1"/>
           <p:nvPr/>
         </p:nvSpPr>
         <p:spPr>
           <a:xfrm>
-            <a:off x="216000" y="1576800"/>
-            <a:ext cx="122400" cy="108000"/>
+            <a:off x="1620000" y="1476000"/>
+            <a:ext cx="1368000" cy="133351"/>
           </a:xfrm>
           <a:prstGeom prst="rect">
             <a:avLst/>
@@ -3446,55 +3859,15 @@
           </a:bodyPr>
           <a:lstStyle/>
           <a:p>
-            <a:pPr algn="l">
+            <a:pPr algn="r">
               <a:lnSpc>
                 <a:spcPts val="1015"/>
               </a:lnSpc>
             </a:pPr>
             <a:r>
-              <a:rPr sz="700" b="1">
-                <a:solidFill>
-                  <a:srgbClr val="4D4D4D"/>
-                </a:solidFill>
-                <a:latin typeface="맑은 고딕"/>
-                <a:ea typeface="맑은 고딕"/>
-              </a:rPr>
-              <a:t>E</a:t>
-            </a:r>
-          </a:p>
-        </p:txBody>
-      </p:sp>
-      <p:sp>
-        <p:nvSpPr>
-          <p:cNvPr id="12" name="텍스트"/>
-          <p:cNvSpPr txBox="1"/>
-          <p:nvPr/>
-        </p:nvSpPr>
-        <p:spPr>
-          <a:xfrm>
-            <a:off x="360000" y="1576800"/>
-            <a:ext cx="1368000" cy="108000"/>
-          </a:xfrm>
-          <a:prstGeom prst="rect">
-            <a:avLst/>
-          </a:prstGeom>
-          <a:noFill/>
-        </p:spPr>
-        <p:txBody>
-          <a:bodyPr wrap="square" lIns="0" rIns="0" tIns="0" bIns="0" anchor="t">
-            <a:spAutoFit/>
-          </a:bodyPr>
-          <a:lstStyle/>
-          <a:p>
-            <a:pPr algn="l">
-              <a:lnSpc>
-                <a:spcPts val="1015"/>
-              </a:lnSpc>
-            </a:pPr>
-            <a:r>
               <a:rPr sz="700" b="0">
                 <a:solidFill>
-                  <a:srgbClr val="4D4D4D"/>
+                  <a:srgbClr val="FFFFFF"/>
                 </a:solidFill>
                 <a:latin typeface="맑은 고딕"/>
                 <a:ea typeface="맑은 고딕"/>
@@ -3506,14 +3879,14 @@
       </p:sp>
       <p:sp>
         <p:nvSpPr>
-          <p:cNvPr id="13" name="텍스트"/>
+          <p:cNvPr id="27" name="텍스트"/>
           <p:cNvSpPr txBox="1"/>
           <p:nvPr/>
         </p:nvSpPr>
         <p:spPr>
           <a:xfrm>
-            <a:off x="1800000" y="1432800"/>
-            <a:ext cx="122400" cy="108000"/>
+            <a:off x="1620000" y="1612800"/>
+            <a:ext cx="1368000" cy="133351"/>
           </a:xfrm>
           <a:prstGeom prst="rect">
             <a:avLst/>
@@ -3526,55 +3899,15 @@
           </a:bodyPr>
           <a:lstStyle/>
           <a:p>
-            <a:pPr algn="l">
+            <a:pPr algn="r">
               <a:lnSpc>
                 <a:spcPts val="1015"/>
               </a:lnSpc>
             </a:pPr>
             <a:r>
-              <a:rPr sz="700" b="1">
-                <a:solidFill>
-                  <a:srgbClr val="4D4D4D"/>
-                </a:solidFill>
-                <a:latin typeface="맑은 고딕"/>
-                <a:ea typeface="맑은 고딕"/>
-              </a:rPr>
-              <a:t>A</a:t>
-            </a:r>
-          </a:p>
-        </p:txBody>
-      </p:sp>
-      <p:sp>
-        <p:nvSpPr>
-          <p:cNvPr id="14" name="텍스트"/>
-          <p:cNvSpPr txBox="1"/>
-          <p:nvPr/>
-        </p:nvSpPr>
-        <p:spPr>
-          <a:xfrm>
-            <a:off x="1944000" y="1432800"/>
-            <a:ext cx="1188000" cy="216000"/>
-          </a:xfrm>
-          <a:prstGeom prst="rect">
-            <a:avLst/>
-          </a:prstGeom>
-          <a:noFill/>
-        </p:spPr>
-        <p:txBody>
-          <a:bodyPr wrap="square" lIns="0" rIns="0" tIns="0" bIns="0" anchor="t">
-            <a:spAutoFit/>
-          </a:bodyPr>
-          <a:lstStyle/>
-          <a:p>
-            <a:pPr algn="l">
-              <a:lnSpc>
-                <a:spcPts val="1015"/>
-              </a:lnSpc>
-            </a:pPr>
-            <a:r>
               <a:rPr sz="700" b="0">
                 <a:solidFill>
-                  <a:srgbClr val="4D4D4D"/>
+                  <a:srgbClr val="FFFFFF"/>
                 </a:solidFill>
                 <a:latin typeface="맑은 고딕"/>
                 <a:ea typeface="맑은 고딕"/>
@@ -3598,7 +3931,7 @@
     <p:bg>
       <p:bgPr>
         <a:solidFill>
-          <a:srgbClr val="FBF8F2"/>
+          <a:srgbClr val="0E1116"/>
         </a:solidFill>
         <a:effectLst/>
       </p:bgPr>
@@ -3612,77 +3945,20 @@
       <p:grpSpPr/>
       <p:sp>
         <p:nvSpPr>
-          <p:cNvPr id="2" name="Freeform 1"/>
+          <p:cNvPr id="2" name="Rectangle 1"/>
           <p:cNvSpPr/>
           <p:nvPr/>
         </p:nvSpPr>
         <p:spPr>
           <a:xfrm>
-            <a:off x="2016000" y="576000"/>
-            <a:ext cx="1224000" cy="1224000"/>
-          </a:xfrm>
-          <a:custGeom>
+            <a:off x="252000" y="540000"/>
+            <a:ext cx="28800" cy="720000"/>
+          </a:xfrm>
+          <a:prstGeom prst="rect">
             <a:avLst/>
-            <a:gdLst/>
-            <a:ahLst/>
-            <a:cxnLst/>
-            <a:rect l="l" t="t" r="r" b="b"/>
-            <a:pathLst>
-              <a:path w="1224000" h="1224000">
-                <a:moveTo>
-                  <a:pt x="1224000" y="1224000"/>
-                </a:moveTo>
-                <a:lnTo>
-                  <a:pt x="0" y="1224000"/>
-                </a:lnTo>
-                <a:lnTo>
-                  <a:pt x="7696" y="1086955"/>
-                </a:lnTo>
-                <a:lnTo>
-                  <a:pt x="30688" y="951634"/>
-                </a:lnTo>
-                <a:lnTo>
-                  <a:pt x="68687" y="819738"/>
-                </a:lnTo>
-                <a:lnTo>
-                  <a:pt x="121214" y="692926"/>
-                </a:lnTo>
-                <a:lnTo>
-                  <a:pt x="187610" y="572793"/>
-                </a:lnTo>
-                <a:lnTo>
-                  <a:pt x="267038" y="460848"/>
-                </a:lnTo>
-                <a:lnTo>
-                  <a:pt x="358501" y="358501"/>
-                </a:lnTo>
-                <a:lnTo>
-                  <a:pt x="460848" y="267038"/>
-                </a:lnTo>
-                <a:lnTo>
-                  <a:pt x="572793" y="187610"/>
-                </a:lnTo>
-                <a:lnTo>
-                  <a:pt x="692926" y="121214"/>
-                </a:lnTo>
-                <a:lnTo>
-                  <a:pt x="819738" y="68687"/>
-                </a:lnTo>
-                <a:lnTo>
-                  <a:pt x="951634" y="30688"/>
-                </a:lnTo>
-                <a:lnTo>
-                  <a:pt x="1086955" y="7696"/>
-                </a:lnTo>
-                <a:lnTo>
-                  <a:pt x="1224000" y="0"/>
-                </a:lnTo>
-                <a:close/>
-              </a:path>
-            </a:pathLst>
-          </a:custGeom>
+          </a:prstGeom>
           <a:solidFill>
-            <a:srgbClr val="418B83"/>
+            <a:srgbClr val="6D7695"/>
           </a:solidFill>
           <a:ln>
             <a:noFill/>
@@ -3698,198 +3974,14 @@
       </p:sp>
       <p:sp>
         <p:nvSpPr>
-          <p:cNvPr id="3" name="Freeform 2"/>
-          <p:cNvSpPr/>
-          <p:nvPr/>
-        </p:nvSpPr>
-        <p:spPr>
-          <a:xfrm>
-            <a:off x="2520000" y="1080000"/>
-            <a:ext cx="720000" cy="720000"/>
-          </a:xfrm>
-          <a:custGeom>
-            <a:avLst/>
-            <a:gdLst/>
-            <a:ahLst/>
-            <a:cxnLst/>
-            <a:rect l="l" t="t" r="r" b="b"/>
-            <a:pathLst>
-              <a:path w="720000" h="720000">
-                <a:moveTo>
-                  <a:pt x="720000" y="720000"/>
-                </a:moveTo>
-                <a:lnTo>
-                  <a:pt x="0" y="720000"/>
-                </a:lnTo>
-                <a:lnTo>
-                  <a:pt x="4527" y="639386"/>
-                </a:lnTo>
-                <a:lnTo>
-                  <a:pt x="18052" y="559785"/>
-                </a:lnTo>
-                <a:lnTo>
-                  <a:pt x="40404" y="482199"/>
-                </a:lnTo>
-                <a:lnTo>
-                  <a:pt x="71302" y="407604"/>
-                </a:lnTo>
-                <a:lnTo>
-                  <a:pt x="110359" y="336937"/>
-                </a:lnTo>
-                <a:lnTo>
-                  <a:pt x="157081" y="271087"/>
-                </a:lnTo>
-                <a:lnTo>
-                  <a:pt x="210883" y="210883"/>
-                </a:lnTo>
-                <a:lnTo>
-                  <a:pt x="271087" y="157081"/>
-                </a:lnTo>
-                <a:lnTo>
-                  <a:pt x="336937" y="110359"/>
-                </a:lnTo>
-                <a:lnTo>
-                  <a:pt x="407604" y="71302"/>
-                </a:lnTo>
-                <a:lnTo>
-                  <a:pt x="482199" y="40404"/>
-                </a:lnTo>
-                <a:lnTo>
-                  <a:pt x="559785" y="18052"/>
-                </a:lnTo>
-                <a:lnTo>
-                  <a:pt x="639386" y="4527"/>
-                </a:lnTo>
-                <a:lnTo>
-                  <a:pt x="720000" y="0"/>
-                </a:lnTo>
-                <a:close/>
-              </a:path>
-            </a:pathLst>
-          </a:custGeom>
-          <a:solidFill>
-            <a:srgbClr val="CADFDC"/>
-          </a:solidFill>
-          <a:ln>
-            <a:noFill/>
-          </a:ln>
-        </p:spPr>
-        <p:txBody>
-          <a:bodyPr rtlCol="0" anchor="ctr"/>
-          <a:lstStyle/>
-          <a:p>
-            <a:pPr algn="ctr"/>
-          </a:p>
-        </p:txBody>
-      </p:sp>
-      <p:sp>
-        <p:nvSpPr>
-          <p:cNvPr id="4" name="Freeform 3"/>
-          <p:cNvSpPr/>
-          <p:nvPr/>
-        </p:nvSpPr>
-        <p:spPr>
-          <a:xfrm>
-            <a:off x="2794320" y="1360080"/>
-            <a:ext cx="171360" cy="226800"/>
-          </a:xfrm>
-          <a:custGeom>
-            <a:avLst/>
-            <a:gdLst/>
-            <a:ahLst/>
-            <a:cxnLst/>
-            <a:rect l="l" t="t" r="r" b="b"/>
-            <a:pathLst>
-              <a:path w="171360" h="226800">
-                <a:moveTo>
-                  <a:pt x="0" y="25200"/>
-                </a:moveTo>
-                <a:lnTo>
-                  <a:pt x="85680" y="0"/>
-                </a:lnTo>
-                <a:lnTo>
-                  <a:pt x="171360" y="25200"/>
-                </a:lnTo>
-                <a:lnTo>
-                  <a:pt x="171360" y="120960"/>
-                </a:lnTo>
-                <a:lnTo>
-                  <a:pt x="85680" y="226800"/>
-                </a:lnTo>
-                <a:lnTo>
-                  <a:pt x="0" y="120960"/>
-                </a:lnTo>
-                <a:close/>
-              </a:path>
-            </a:pathLst>
-          </a:custGeom>
-          <a:solidFill>
-            <a:srgbClr val="FFFFFF"/>
-          </a:solidFill>
-          <a:ln>
-            <a:noFill/>
-          </a:ln>
-        </p:spPr>
-        <p:txBody>
-          <a:bodyPr rtlCol="0" anchor="ctr"/>
-          <a:lstStyle/>
-          <a:p>
-            <a:pPr algn="ctr"/>
-          </a:p>
-        </p:txBody>
-      </p:sp>
-      <p:cxnSp>
-        <p:nvCxnSpPr>
-          <p:cNvPr id="5" name="Connector 4"/>
-          <p:cNvCxnSpPr/>
-          <p:nvPr/>
-        </p:nvCxnSpPr>
-        <p:spPr>
-          <a:xfrm>
-            <a:off x="2844720" y="1476000"/>
-            <a:ext cx="27720" cy="30240"/>
-          </a:xfrm>
-          <a:prstGeom prst="line">
-            <a:avLst/>
-          </a:prstGeom>
-          <a:ln w="17640">
-            <a:solidFill>
-              <a:srgbClr val="737373"/>
-            </a:solidFill>
-          </a:ln>
-        </p:spPr>
-      </p:cxnSp>
-      <p:cxnSp>
-        <p:nvCxnSpPr>
-          <p:cNvPr id="6" name="Connector 5"/>
-          <p:cNvCxnSpPr/>
-          <p:nvPr/>
-        </p:nvCxnSpPr>
-        <p:spPr>
-          <a:xfrm flipV="1">
-            <a:off x="2872440" y="1445760"/>
-            <a:ext cx="47880" cy="60480"/>
-          </a:xfrm>
-          <a:prstGeom prst="line">
-            <a:avLst/>
-          </a:prstGeom>
-          <a:ln w="17640">
-            <a:solidFill>
-              <a:srgbClr val="737373"/>
-            </a:solidFill>
-          </a:ln>
-        </p:spPr>
-      </p:cxnSp>
-      <p:sp>
-        <p:nvSpPr>
-          <p:cNvPr id="7" name="텍스트"/>
+          <p:cNvPr id="3" name="텍스트"/>
           <p:cNvSpPr txBox="1"/>
           <p:nvPr/>
         </p:nvSpPr>
         <p:spPr>
           <a:xfrm>
-            <a:off x="252000" y="324000"/>
-            <a:ext cx="1944000" cy="720000"/>
+            <a:off x="424800" y="612000"/>
+            <a:ext cx="2160000" cy="648000"/>
           </a:xfrm>
           <a:prstGeom prst="rect">
             <a:avLst/>
@@ -3904,49 +3996,32 @@
           <a:p>
             <a:pPr algn="l">
               <a:lnSpc>
-                <a:spcPts val="1739"/>
+                <a:spcPts val="1812"/>
               </a:lnSpc>
             </a:pPr>
             <a:r>
-              <a:rPr sz="1200" b="1">
+              <a:rPr sz="1250" b="1">
                 <a:solidFill>
-                  <a:srgbClr val="37261A"/>
+                  <a:srgbClr val="FFFFFF"/>
                 </a:solidFill>
-                <a:latin typeface="바탕"/>
-                <a:ea typeface="바탕"/>
+                <a:latin typeface="맑은 고딕"/>
+                <a:ea typeface="맑은 고딕"/>
               </a:rPr>
-              <a:t>약속은 가볍게</a:t>
-            </a:r>
-          </a:p>
-          <a:p>
-            <a:pPr algn="l">
-              <a:lnSpc>
-                <a:spcPts val="1739"/>
-              </a:lnSpc>
-            </a:pPr>
-            <a:r>
-              <a:rPr sz="1200" b="1">
-                <a:solidFill>
-                  <a:srgbClr val="37261A"/>
-                </a:solidFill>
-                <a:latin typeface="바탕"/>
-                <a:ea typeface="바탕"/>
-              </a:rPr>
-              <a:t>하지 않습니다</a:t>
-            </a:r>
-          </a:p>
-        </p:txBody>
-      </p:sp>
-      <p:sp>
-        <p:nvSpPr>
-          <p:cNvPr id="8" name="텍스트"/>
+              <a:t>약속은 가볍게 하지 않습니다</a:t>
+            </a:r>
+          </a:p>
+        </p:txBody>
+      </p:sp>
+      <p:sp>
+        <p:nvSpPr>
+          <p:cNvPr id="4" name="텍스트"/>
           <p:cNvSpPr txBox="1"/>
           <p:nvPr/>
         </p:nvSpPr>
         <p:spPr>
           <a:xfrm>
-            <a:off x="252000" y="1476000"/>
-            <a:ext cx="1440000" cy="108000"/>
+            <a:off x="424800" y="1512000"/>
+            <a:ext cx="1800000" cy="123826"/>
           </a:xfrm>
           <a:prstGeom prst="rect">
             <a:avLst/>
@@ -3961,13 +4036,13 @@
           <a:p>
             <a:pPr algn="l">
               <a:lnSpc>
-                <a:spcPts val="1087"/>
+                <a:spcPts val="942"/>
               </a:lnSpc>
             </a:pPr>
             <a:r>
-              <a:rPr sz="750" b="1" spc="200">
+              <a:rPr sz="650" b="1" spc="200">
                 <a:solidFill>
-                  <a:srgbClr val="7C7066"/>
+                  <a:srgbClr val="A3A9B5"/>
                 </a:solidFill>
                 <a:latin typeface="맑은 고딕"/>
                 <a:ea typeface="맑은 고딕"/>

--- a/public/fun/cards/finance/finance-36.pptx
+++ b/public/fun/cards/finance/finance-36.pptx
@@ -3099,16 +3099,45 @@
       <p:grpSpPr/>
       <p:sp>
         <p:nvSpPr>
-          <p:cNvPr id="2" name="Oval 1"/>
+          <p:cNvPr id="2" name="Rectangle 1"/>
           <p:cNvSpPr/>
           <p:nvPr/>
         </p:nvSpPr>
         <p:spPr>
           <a:xfrm>
-            <a:off x="2646000" y="234000"/>
-            <a:ext cx="36000" cy="36000"/>
-          </a:xfrm>
-          <a:prstGeom prst="ellipse">
+            <a:off x="0" y="1296000"/>
+            <a:ext cx="3240000" cy="504000"/>
+          </a:xfrm>
+          <a:prstGeom prst="rect">
+            <a:avLst/>
+          </a:prstGeom>
+          <a:solidFill>
+            <a:srgbClr val="26292D"/>
+          </a:solidFill>
+          <a:ln>
+            <a:noFill/>
+          </a:ln>
+        </p:spPr>
+        <p:txBody>
+          <a:bodyPr rtlCol="0" anchor="ctr"/>
+          <a:lstStyle/>
+          <a:p>
+            <a:pPr algn="ctr"/>
+          </a:p>
+        </p:txBody>
+      </p:sp>
+      <p:sp>
+        <p:nvSpPr>
+          <p:cNvPr id="3" name="Rectangle 2"/>
+          <p:cNvSpPr/>
+          <p:nvPr/>
+        </p:nvSpPr>
+        <p:spPr>
+          <a:xfrm>
+            <a:off x="0" y="1296000"/>
+            <a:ext cx="3240000" cy="14400"/>
+          </a:xfrm>
+          <a:prstGeom prst="rect">
             <a:avLst/>
           </a:prstGeom>
           <a:solidFill>
@@ -3128,565 +3157,14 @@
       </p:sp>
       <p:sp>
         <p:nvSpPr>
-          <p:cNvPr id="3" name="Oval 2"/>
-          <p:cNvSpPr/>
-          <p:nvPr/>
-        </p:nvSpPr>
-        <p:spPr>
-          <a:xfrm>
-            <a:off x="2646000" y="334800"/>
-            <a:ext cx="36000" cy="36000"/>
-          </a:xfrm>
-          <a:prstGeom prst="ellipse">
-            <a:avLst/>
-          </a:prstGeom>
-          <a:solidFill>
-            <a:srgbClr val="26292D"/>
-          </a:solidFill>
-          <a:ln>
-            <a:noFill/>
-          </a:ln>
-        </p:spPr>
-        <p:txBody>
-          <a:bodyPr rtlCol="0" anchor="ctr"/>
-          <a:lstStyle/>
-          <a:p>
-            <a:pPr algn="ctr"/>
-          </a:p>
-        </p:txBody>
-      </p:sp>
-      <p:sp>
-        <p:nvSpPr>
-          <p:cNvPr id="4" name="Oval 3"/>
-          <p:cNvSpPr/>
-          <p:nvPr/>
-        </p:nvSpPr>
-        <p:spPr>
-          <a:xfrm>
-            <a:off x="2646000" y="435600"/>
-            <a:ext cx="36000" cy="36000"/>
-          </a:xfrm>
-          <a:prstGeom prst="ellipse">
-            <a:avLst/>
-          </a:prstGeom>
-          <a:solidFill>
-            <a:srgbClr val="26292D"/>
-          </a:solidFill>
-          <a:ln>
-            <a:noFill/>
-          </a:ln>
-        </p:spPr>
-        <p:txBody>
-          <a:bodyPr rtlCol="0" anchor="ctr"/>
-          <a:lstStyle/>
-          <a:p>
-            <a:pPr algn="ctr"/>
-          </a:p>
-        </p:txBody>
-      </p:sp>
-      <p:sp>
-        <p:nvSpPr>
-          <p:cNvPr id="5" name="Oval 4"/>
-          <p:cNvSpPr/>
-          <p:nvPr/>
-        </p:nvSpPr>
-        <p:spPr>
-          <a:xfrm>
-            <a:off x="2646000" y="536400"/>
-            <a:ext cx="36000" cy="36000"/>
-          </a:xfrm>
-          <a:prstGeom prst="ellipse">
-            <a:avLst/>
-          </a:prstGeom>
-          <a:solidFill>
-            <a:srgbClr val="6D7695"/>
-          </a:solidFill>
-          <a:ln>
-            <a:noFill/>
-          </a:ln>
-        </p:spPr>
-        <p:txBody>
-          <a:bodyPr rtlCol="0" anchor="ctr"/>
-          <a:lstStyle/>
-          <a:p>
-            <a:pPr algn="ctr"/>
-          </a:p>
-        </p:txBody>
-      </p:sp>
-      <p:sp>
-        <p:nvSpPr>
-          <p:cNvPr id="6" name="Oval 5"/>
-          <p:cNvSpPr/>
-          <p:nvPr/>
-        </p:nvSpPr>
-        <p:spPr>
-          <a:xfrm>
-            <a:off x="2746800" y="234000"/>
-            <a:ext cx="36000" cy="36000"/>
-          </a:xfrm>
-          <a:prstGeom prst="ellipse">
-            <a:avLst/>
-          </a:prstGeom>
-          <a:solidFill>
-            <a:srgbClr val="26292D"/>
-          </a:solidFill>
-          <a:ln>
-            <a:noFill/>
-          </a:ln>
-        </p:spPr>
-        <p:txBody>
-          <a:bodyPr rtlCol="0" anchor="ctr"/>
-          <a:lstStyle/>
-          <a:p>
-            <a:pPr algn="ctr"/>
-          </a:p>
-        </p:txBody>
-      </p:sp>
-      <p:sp>
-        <p:nvSpPr>
-          <p:cNvPr id="7" name="Oval 6"/>
-          <p:cNvSpPr/>
-          <p:nvPr/>
-        </p:nvSpPr>
-        <p:spPr>
-          <a:xfrm>
-            <a:off x="2746800" y="334800"/>
-            <a:ext cx="36000" cy="36000"/>
-          </a:xfrm>
-          <a:prstGeom prst="ellipse">
-            <a:avLst/>
-          </a:prstGeom>
-          <a:solidFill>
-            <a:srgbClr val="26292D"/>
-          </a:solidFill>
-          <a:ln>
-            <a:noFill/>
-          </a:ln>
-        </p:spPr>
-        <p:txBody>
-          <a:bodyPr rtlCol="0" anchor="ctr"/>
-          <a:lstStyle/>
-          <a:p>
-            <a:pPr algn="ctr"/>
-          </a:p>
-        </p:txBody>
-      </p:sp>
-      <p:sp>
-        <p:nvSpPr>
-          <p:cNvPr id="8" name="Oval 7"/>
-          <p:cNvSpPr/>
-          <p:nvPr/>
-        </p:nvSpPr>
-        <p:spPr>
-          <a:xfrm>
-            <a:off x="2746800" y="435600"/>
-            <a:ext cx="36000" cy="36000"/>
-          </a:xfrm>
-          <a:prstGeom prst="ellipse">
-            <a:avLst/>
-          </a:prstGeom>
-          <a:solidFill>
-            <a:srgbClr val="6D7695"/>
-          </a:solidFill>
-          <a:ln>
-            <a:noFill/>
-          </a:ln>
-        </p:spPr>
-        <p:txBody>
-          <a:bodyPr rtlCol="0" anchor="ctr"/>
-          <a:lstStyle/>
-          <a:p>
-            <a:pPr algn="ctr"/>
-          </a:p>
-        </p:txBody>
-      </p:sp>
-      <p:sp>
-        <p:nvSpPr>
-          <p:cNvPr id="9" name="Oval 8"/>
-          <p:cNvSpPr/>
-          <p:nvPr/>
-        </p:nvSpPr>
-        <p:spPr>
-          <a:xfrm>
-            <a:off x="2746800" y="536400"/>
-            <a:ext cx="36000" cy="36000"/>
-          </a:xfrm>
-          <a:prstGeom prst="ellipse">
-            <a:avLst/>
-          </a:prstGeom>
-          <a:solidFill>
-            <a:srgbClr val="26292D"/>
-          </a:solidFill>
-          <a:ln>
-            <a:noFill/>
-          </a:ln>
-        </p:spPr>
-        <p:txBody>
-          <a:bodyPr rtlCol="0" anchor="ctr"/>
-          <a:lstStyle/>
-          <a:p>
-            <a:pPr algn="ctr"/>
-          </a:p>
-        </p:txBody>
-      </p:sp>
-      <p:sp>
-        <p:nvSpPr>
-          <p:cNvPr id="10" name="Oval 9"/>
-          <p:cNvSpPr/>
-          <p:nvPr/>
-        </p:nvSpPr>
-        <p:spPr>
-          <a:xfrm>
-            <a:off x="2847600" y="234000"/>
-            <a:ext cx="36000" cy="36000"/>
-          </a:xfrm>
-          <a:prstGeom prst="ellipse">
-            <a:avLst/>
-          </a:prstGeom>
-          <a:solidFill>
-            <a:srgbClr val="26292D"/>
-          </a:solidFill>
-          <a:ln>
-            <a:noFill/>
-          </a:ln>
-        </p:spPr>
-        <p:txBody>
-          <a:bodyPr rtlCol="0" anchor="ctr"/>
-          <a:lstStyle/>
-          <a:p>
-            <a:pPr algn="ctr"/>
-          </a:p>
-        </p:txBody>
-      </p:sp>
-      <p:sp>
-        <p:nvSpPr>
-          <p:cNvPr id="11" name="Oval 10"/>
-          <p:cNvSpPr/>
-          <p:nvPr/>
-        </p:nvSpPr>
-        <p:spPr>
-          <a:xfrm>
-            <a:off x="2847600" y="334800"/>
-            <a:ext cx="36000" cy="36000"/>
-          </a:xfrm>
-          <a:prstGeom prst="ellipse">
-            <a:avLst/>
-          </a:prstGeom>
-          <a:solidFill>
-            <a:srgbClr val="6D7695"/>
-          </a:solidFill>
-          <a:ln>
-            <a:noFill/>
-          </a:ln>
-        </p:spPr>
-        <p:txBody>
-          <a:bodyPr rtlCol="0" anchor="ctr"/>
-          <a:lstStyle/>
-          <a:p>
-            <a:pPr algn="ctr"/>
-          </a:p>
-        </p:txBody>
-      </p:sp>
-      <p:sp>
-        <p:nvSpPr>
-          <p:cNvPr id="12" name="Oval 11"/>
-          <p:cNvSpPr/>
-          <p:nvPr/>
-        </p:nvSpPr>
-        <p:spPr>
-          <a:xfrm>
-            <a:off x="2847600" y="435600"/>
-            <a:ext cx="36000" cy="36000"/>
-          </a:xfrm>
-          <a:prstGeom prst="ellipse">
-            <a:avLst/>
-          </a:prstGeom>
-          <a:solidFill>
-            <a:srgbClr val="26292D"/>
-          </a:solidFill>
-          <a:ln>
-            <a:noFill/>
-          </a:ln>
-        </p:spPr>
-        <p:txBody>
-          <a:bodyPr rtlCol="0" anchor="ctr"/>
-          <a:lstStyle/>
-          <a:p>
-            <a:pPr algn="ctr"/>
-          </a:p>
-        </p:txBody>
-      </p:sp>
-      <p:sp>
-        <p:nvSpPr>
-          <p:cNvPr id="13" name="Oval 12"/>
-          <p:cNvSpPr/>
-          <p:nvPr/>
-        </p:nvSpPr>
-        <p:spPr>
-          <a:xfrm>
-            <a:off x="2847600" y="536400"/>
-            <a:ext cx="36000" cy="36000"/>
-          </a:xfrm>
-          <a:prstGeom prst="ellipse">
-            <a:avLst/>
-          </a:prstGeom>
-          <a:solidFill>
-            <a:srgbClr val="26292D"/>
-          </a:solidFill>
-          <a:ln>
-            <a:noFill/>
-          </a:ln>
-        </p:spPr>
-        <p:txBody>
-          <a:bodyPr rtlCol="0" anchor="ctr"/>
-          <a:lstStyle/>
-          <a:p>
-            <a:pPr algn="ctr"/>
-          </a:p>
-        </p:txBody>
-      </p:sp>
-      <p:sp>
-        <p:nvSpPr>
-          <p:cNvPr id="14" name="Oval 13"/>
-          <p:cNvSpPr/>
-          <p:nvPr/>
-        </p:nvSpPr>
-        <p:spPr>
-          <a:xfrm>
-            <a:off x="2948400" y="234000"/>
-            <a:ext cx="36000" cy="36000"/>
-          </a:xfrm>
-          <a:prstGeom prst="ellipse">
-            <a:avLst/>
-          </a:prstGeom>
-          <a:solidFill>
-            <a:srgbClr val="6D7695"/>
-          </a:solidFill>
-          <a:ln>
-            <a:noFill/>
-          </a:ln>
-        </p:spPr>
-        <p:txBody>
-          <a:bodyPr rtlCol="0" anchor="ctr"/>
-          <a:lstStyle/>
-          <a:p>
-            <a:pPr algn="ctr"/>
-          </a:p>
-        </p:txBody>
-      </p:sp>
-      <p:sp>
-        <p:nvSpPr>
-          <p:cNvPr id="15" name="Oval 14"/>
-          <p:cNvSpPr/>
-          <p:nvPr/>
-        </p:nvSpPr>
-        <p:spPr>
-          <a:xfrm>
-            <a:off x="2948400" y="334800"/>
-            <a:ext cx="36000" cy="36000"/>
-          </a:xfrm>
-          <a:prstGeom prst="ellipse">
-            <a:avLst/>
-          </a:prstGeom>
-          <a:solidFill>
-            <a:srgbClr val="26292D"/>
-          </a:solidFill>
-          <a:ln>
-            <a:noFill/>
-          </a:ln>
-        </p:spPr>
-        <p:txBody>
-          <a:bodyPr rtlCol="0" anchor="ctr"/>
-          <a:lstStyle/>
-          <a:p>
-            <a:pPr algn="ctr"/>
-          </a:p>
-        </p:txBody>
-      </p:sp>
-      <p:sp>
-        <p:nvSpPr>
-          <p:cNvPr id="16" name="Oval 15"/>
-          <p:cNvSpPr/>
-          <p:nvPr/>
-        </p:nvSpPr>
-        <p:spPr>
-          <a:xfrm>
-            <a:off x="2948400" y="435600"/>
-            <a:ext cx="36000" cy="36000"/>
-          </a:xfrm>
-          <a:prstGeom prst="ellipse">
-            <a:avLst/>
-          </a:prstGeom>
-          <a:solidFill>
-            <a:srgbClr val="26292D"/>
-          </a:solidFill>
-          <a:ln>
-            <a:noFill/>
-          </a:ln>
-        </p:spPr>
-        <p:txBody>
-          <a:bodyPr rtlCol="0" anchor="ctr"/>
-          <a:lstStyle/>
-          <a:p>
-            <a:pPr algn="ctr"/>
-          </a:p>
-        </p:txBody>
-      </p:sp>
-      <p:sp>
-        <p:nvSpPr>
-          <p:cNvPr id="17" name="Oval 16"/>
-          <p:cNvSpPr/>
-          <p:nvPr/>
-        </p:nvSpPr>
-        <p:spPr>
-          <a:xfrm>
-            <a:off x="2948400" y="536400"/>
-            <a:ext cx="36000" cy="36000"/>
-          </a:xfrm>
-          <a:prstGeom prst="ellipse">
-            <a:avLst/>
-          </a:prstGeom>
-          <a:solidFill>
-            <a:srgbClr val="6D7695"/>
-          </a:solidFill>
-          <a:ln>
-            <a:noFill/>
-          </a:ln>
-        </p:spPr>
-        <p:txBody>
-          <a:bodyPr rtlCol="0" anchor="ctr"/>
-          <a:lstStyle/>
-          <a:p>
-            <a:pPr algn="ctr"/>
-          </a:p>
-        </p:txBody>
-      </p:sp>
-      <p:sp>
-        <p:nvSpPr>
-          <p:cNvPr id="18" name="Oval 17"/>
-          <p:cNvSpPr/>
-          <p:nvPr/>
-        </p:nvSpPr>
-        <p:spPr>
-          <a:xfrm>
-            <a:off x="3049200" y="234000"/>
-            <a:ext cx="36000" cy="36000"/>
-          </a:xfrm>
-          <a:prstGeom prst="ellipse">
-            <a:avLst/>
-          </a:prstGeom>
-          <a:solidFill>
-            <a:srgbClr val="26292D"/>
-          </a:solidFill>
-          <a:ln>
-            <a:noFill/>
-          </a:ln>
-        </p:spPr>
-        <p:txBody>
-          <a:bodyPr rtlCol="0" anchor="ctr"/>
-          <a:lstStyle/>
-          <a:p>
-            <a:pPr algn="ctr"/>
-          </a:p>
-        </p:txBody>
-      </p:sp>
-      <p:sp>
-        <p:nvSpPr>
-          <p:cNvPr id="19" name="Oval 18"/>
-          <p:cNvSpPr/>
-          <p:nvPr/>
-        </p:nvSpPr>
-        <p:spPr>
-          <a:xfrm>
-            <a:off x="3049200" y="334800"/>
-            <a:ext cx="36000" cy="36000"/>
-          </a:xfrm>
-          <a:prstGeom prst="ellipse">
-            <a:avLst/>
-          </a:prstGeom>
-          <a:solidFill>
-            <a:srgbClr val="26292D"/>
-          </a:solidFill>
-          <a:ln>
-            <a:noFill/>
-          </a:ln>
-        </p:spPr>
-        <p:txBody>
-          <a:bodyPr rtlCol="0" anchor="ctr"/>
-          <a:lstStyle/>
-          <a:p>
-            <a:pPr algn="ctr"/>
-          </a:p>
-        </p:txBody>
-      </p:sp>
-      <p:sp>
-        <p:nvSpPr>
-          <p:cNvPr id="20" name="Oval 19"/>
-          <p:cNvSpPr/>
-          <p:nvPr/>
-        </p:nvSpPr>
-        <p:spPr>
-          <a:xfrm>
-            <a:off x="3049200" y="435600"/>
-            <a:ext cx="36000" cy="36000"/>
-          </a:xfrm>
-          <a:prstGeom prst="ellipse">
-            <a:avLst/>
-          </a:prstGeom>
-          <a:solidFill>
-            <a:srgbClr val="6D7695"/>
-          </a:solidFill>
-          <a:ln>
-            <a:noFill/>
-          </a:ln>
-        </p:spPr>
-        <p:txBody>
-          <a:bodyPr rtlCol="0" anchor="ctr"/>
-          <a:lstStyle/>
-          <a:p>
-            <a:pPr algn="ctr"/>
-          </a:p>
-        </p:txBody>
-      </p:sp>
-      <p:sp>
-        <p:nvSpPr>
-          <p:cNvPr id="21" name="Oval 20"/>
-          <p:cNvSpPr/>
-          <p:nvPr/>
-        </p:nvSpPr>
-        <p:spPr>
-          <a:xfrm>
-            <a:off x="3049200" y="536400"/>
-            <a:ext cx="36000" cy="36000"/>
-          </a:xfrm>
-          <a:prstGeom prst="ellipse">
-            <a:avLst/>
-          </a:prstGeom>
-          <a:solidFill>
-            <a:srgbClr val="26292D"/>
-          </a:solidFill>
-          <a:ln>
-            <a:noFill/>
-          </a:ln>
-        </p:spPr>
-        <p:txBody>
-          <a:bodyPr rtlCol="0" anchor="ctr"/>
-          <a:lstStyle/>
-          <a:p>
-            <a:pPr algn="ctr"/>
-          </a:p>
-        </p:txBody>
-      </p:sp>
-      <p:sp>
-        <p:nvSpPr>
-          <p:cNvPr id="22" name="텍스트"/>
+          <p:cNvPr id="4" name="텍스트"/>
           <p:cNvSpPr txBox="1"/>
           <p:nvPr/>
         </p:nvSpPr>
         <p:spPr>
           <a:xfrm>
-            <a:off x="252000" y="223200"/>
-            <a:ext cx="1440000" cy="133351"/>
+            <a:off x="252000" y="252000"/>
+            <a:ext cx="1512000" cy="123826"/>
           </a:xfrm>
           <a:prstGeom prst="rect">
             <a:avLst/>
@@ -3701,11 +3179,11 @@
           <a:p>
             <a:pPr algn="l">
               <a:lnSpc>
-                <a:spcPts val="1015"/>
+                <a:spcPts val="942"/>
               </a:lnSpc>
             </a:pPr>
             <a:r>
-              <a:rPr sz="700" b="1" spc="200">
+              <a:rPr sz="650" b="1" spc="220">
                 <a:solidFill>
                   <a:srgbClr val="A3A9B5"/>
                 </a:solidFill>
@@ -3719,14 +3197,14 @@
       </p:sp>
       <p:sp>
         <p:nvSpPr>
-          <p:cNvPr id="23" name="텍스트"/>
+          <p:cNvPr id="5" name="텍스트"/>
           <p:cNvSpPr txBox="1"/>
           <p:nvPr/>
         </p:nvSpPr>
         <p:spPr>
           <a:xfrm>
-            <a:off x="252000" y="770400"/>
-            <a:ext cx="2016000" cy="360000"/>
+            <a:off x="252000" y="576000"/>
+            <a:ext cx="1800000" cy="237600"/>
           </a:xfrm>
           <a:prstGeom prst="rect">
             <a:avLst/>
@@ -3741,11 +3219,11 @@
           <a:p>
             <a:pPr algn="l">
               <a:lnSpc>
-                <a:spcPts val="3190"/>
+                <a:spcPts val="1957"/>
               </a:lnSpc>
             </a:pPr>
             <a:r>
-              <a:rPr sz="2200" b="1">
+              <a:rPr sz="1350" b="1" spc="120">
                 <a:solidFill>
                   <a:srgbClr val="FFFFFF"/>
                 </a:solidFill>
@@ -3759,14 +3237,14 @@
       </p:sp>
       <p:sp>
         <p:nvSpPr>
-          <p:cNvPr id="24" name="텍스트"/>
+          <p:cNvPr id="6" name="텍스트"/>
           <p:cNvSpPr txBox="1"/>
           <p:nvPr/>
         </p:nvSpPr>
         <p:spPr>
           <a:xfrm>
-            <a:off x="252000" y="1173600"/>
-            <a:ext cx="2016000" cy="171451"/>
+            <a:off x="252000" y="828000"/>
+            <a:ext cx="1800000" cy="133351"/>
           </a:xfrm>
           <a:prstGeom prst="rect">
             <a:avLst/>
@@ -3781,11 +3259,11 @@
           <a:p>
             <a:pPr algn="l">
               <a:lnSpc>
-                <a:spcPts val="1305"/>
+                <a:spcPts val="1015"/>
               </a:lnSpc>
             </a:pPr>
             <a:r>
-              <a:rPr sz="900" b="0">
+              <a:rPr sz="700" b="0" spc="60">
                 <a:solidFill>
                   <a:srgbClr val="A3A9B5"/>
                 </a:solidFill>
@@ -3799,14 +3277,14 @@
       </p:sp>
       <p:sp>
         <p:nvSpPr>
-          <p:cNvPr id="25" name="텍스트"/>
+          <p:cNvPr id="7" name="텍스트"/>
           <p:cNvSpPr txBox="1"/>
           <p:nvPr/>
         </p:nvSpPr>
         <p:spPr>
           <a:xfrm>
-            <a:off x="1620000" y="1339200"/>
-            <a:ext cx="1368000" cy="133351"/>
+            <a:off x="252000" y="1411200"/>
+            <a:ext cx="900000" cy="91441"/>
           </a:xfrm>
           <a:prstGeom prst="rect">
             <a:avLst/>
@@ -3819,13 +3297,53 @@
           </a:bodyPr>
           <a:lstStyle/>
           <a:p>
-            <a:pPr algn="r">
+            <a:pPr algn="l">
               <a:lnSpc>
-                <a:spcPts val="1015"/>
+                <a:spcPts val="696"/>
               </a:lnSpc>
             </a:pPr>
             <a:r>
-              <a:rPr sz="700" b="0">
+              <a:rPr sz="480" b="1" spc="140">
+                <a:solidFill>
+                  <a:srgbClr val="A3A9B5"/>
+                </a:solidFill>
+                <a:latin typeface="맑은 고딕"/>
+                <a:ea typeface="맑은 고딕"/>
+              </a:rPr>
+              <a:t>TEL</a:t>
+            </a:r>
+          </a:p>
+        </p:txBody>
+      </p:sp>
+      <p:sp>
+        <p:nvSpPr>
+          <p:cNvPr id="8" name="텍스트"/>
+          <p:cNvSpPr txBox="1"/>
+          <p:nvPr/>
+        </p:nvSpPr>
+        <p:spPr>
+          <a:xfrm>
+            <a:off x="252000" y="1512000"/>
+            <a:ext cx="900000" cy="120016"/>
+          </a:xfrm>
+          <a:prstGeom prst="rect">
+            <a:avLst/>
+          </a:prstGeom>
+          <a:noFill/>
+        </p:spPr>
+        <p:txBody>
+          <a:bodyPr wrap="square" lIns="0" rIns="0" tIns="0" bIns="0" anchor="t">
+            <a:spAutoFit/>
+          </a:bodyPr>
+          <a:lstStyle/>
+          <a:p>
+            <a:pPr algn="l">
+              <a:lnSpc>
+                <a:spcPts val="913"/>
+              </a:lnSpc>
+            </a:pPr>
+            <a:r>
+              <a:rPr sz="630" b="0">
                 <a:solidFill>
                   <a:srgbClr val="FFFFFF"/>
                 </a:solidFill>
@@ -3837,16 +3355,37 @@
           </a:p>
         </p:txBody>
       </p:sp>
-      <p:sp>
-        <p:nvSpPr>
-          <p:cNvPr id="26" name="텍스트"/>
+      <p:cxnSp>
+        <p:nvCxnSpPr>
+          <p:cNvPr id="9" name="Connector 8"/>
+          <p:cNvCxnSpPr/>
+          <p:nvPr/>
+        </p:nvCxnSpPr>
+        <p:spPr>
+          <a:xfrm>
+            <a:off x="1072800" y="1411200"/>
+            <a:ext cx="0" cy="201600"/>
+          </a:xfrm>
+          <a:prstGeom prst="line">
+            <a:avLst/>
+          </a:prstGeom>
+          <a:ln w="3600">
+            <a:solidFill>
+              <a:srgbClr val="2A2F38"/>
+            </a:solidFill>
+          </a:ln>
+        </p:spPr>
+      </p:cxnSp>
+      <p:sp>
+        <p:nvSpPr>
+          <p:cNvPr id="10" name="텍스트"/>
           <p:cNvSpPr txBox="1"/>
           <p:nvPr/>
         </p:nvSpPr>
         <p:spPr>
           <a:xfrm>
-            <a:off x="1620000" y="1476000"/>
-            <a:ext cx="1368000" cy="133351"/>
+            <a:off x="1152000" y="1411200"/>
+            <a:ext cx="1008000" cy="91441"/>
           </a:xfrm>
           <a:prstGeom prst="rect">
             <a:avLst/>
@@ -3859,13 +3398,53 @@
           </a:bodyPr>
           <a:lstStyle/>
           <a:p>
-            <a:pPr algn="r">
+            <a:pPr algn="l">
               <a:lnSpc>
-                <a:spcPts val="1015"/>
+                <a:spcPts val="696"/>
               </a:lnSpc>
             </a:pPr>
             <a:r>
-              <a:rPr sz="700" b="0">
+              <a:rPr sz="480" b="1" spc="140">
+                <a:solidFill>
+                  <a:srgbClr val="A3A9B5"/>
+                </a:solidFill>
+                <a:latin typeface="맑은 고딕"/>
+                <a:ea typeface="맑은 고딕"/>
+              </a:rPr>
+              <a:t>MAIL</a:t>
+            </a:r>
+          </a:p>
+        </p:txBody>
+      </p:sp>
+      <p:sp>
+        <p:nvSpPr>
+          <p:cNvPr id="11" name="텍스트"/>
+          <p:cNvSpPr txBox="1"/>
+          <p:nvPr/>
+        </p:nvSpPr>
+        <p:spPr>
+          <a:xfrm>
+            <a:off x="1152000" y="1512000"/>
+            <a:ext cx="1008000" cy="120016"/>
+          </a:xfrm>
+          <a:prstGeom prst="rect">
+            <a:avLst/>
+          </a:prstGeom>
+          <a:noFill/>
+        </p:spPr>
+        <p:txBody>
+          <a:bodyPr wrap="square" lIns="0" rIns="0" tIns="0" bIns="0" anchor="t">
+            <a:spAutoFit/>
+          </a:bodyPr>
+          <a:lstStyle/>
+          <a:p>
+            <a:pPr algn="l">
+              <a:lnSpc>
+                <a:spcPts val="913"/>
+              </a:lnSpc>
+            </a:pPr>
+            <a:r>
+              <a:rPr sz="630" b="0">
                 <a:solidFill>
                   <a:srgbClr val="FFFFFF"/>
                 </a:solidFill>
@@ -3877,16 +3456,37 @@
           </a:p>
         </p:txBody>
       </p:sp>
-      <p:sp>
-        <p:nvSpPr>
-          <p:cNvPr id="27" name="텍스트"/>
+      <p:cxnSp>
+        <p:nvCxnSpPr>
+          <p:cNvPr id="12" name="Connector 11"/>
+          <p:cNvCxnSpPr/>
+          <p:nvPr/>
+        </p:nvCxnSpPr>
+        <p:spPr>
+          <a:xfrm>
+            <a:off x="2080800" y="1411200"/>
+            <a:ext cx="0" cy="201600"/>
+          </a:xfrm>
+          <a:prstGeom prst="line">
+            <a:avLst/>
+          </a:prstGeom>
+          <a:ln w="3600">
+            <a:solidFill>
+              <a:srgbClr val="2A2F38"/>
+            </a:solidFill>
+          </a:ln>
+        </p:spPr>
+      </p:cxnSp>
+      <p:sp>
+        <p:nvSpPr>
+          <p:cNvPr id="13" name="텍스트"/>
           <p:cNvSpPr txBox="1"/>
           <p:nvPr/>
         </p:nvSpPr>
         <p:spPr>
           <a:xfrm>
-            <a:off x="1620000" y="1612800"/>
-            <a:ext cx="1368000" cy="133351"/>
+            <a:off x="2160000" y="1411200"/>
+            <a:ext cx="972000" cy="91441"/>
           </a:xfrm>
           <a:prstGeom prst="rect">
             <a:avLst/>
@@ -3899,13 +3499,53 @@
           </a:bodyPr>
           <a:lstStyle/>
           <a:p>
-            <a:pPr algn="r">
+            <a:pPr algn="l">
               <a:lnSpc>
-                <a:spcPts val="1015"/>
+                <a:spcPts val="696"/>
               </a:lnSpc>
             </a:pPr>
             <a:r>
-              <a:rPr sz="700" b="0">
+              <a:rPr sz="480" b="1" spc="140">
+                <a:solidFill>
+                  <a:srgbClr val="A3A9B5"/>
+                </a:solidFill>
+                <a:latin typeface="맑은 고딕"/>
+                <a:ea typeface="맑은 고딕"/>
+              </a:rPr>
+              <a:t>ADDR</a:t>
+            </a:r>
+          </a:p>
+        </p:txBody>
+      </p:sp>
+      <p:sp>
+        <p:nvSpPr>
+          <p:cNvPr id="14" name="텍스트"/>
+          <p:cNvSpPr txBox="1"/>
+          <p:nvPr/>
+        </p:nvSpPr>
+        <p:spPr>
+          <a:xfrm>
+            <a:off x="2160000" y="1512000"/>
+            <a:ext cx="972000" cy="120016"/>
+          </a:xfrm>
+          <a:prstGeom prst="rect">
+            <a:avLst/>
+          </a:prstGeom>
+          <a:noFill/>
+        </p:spPr>
+        <p:txBody>
+          <a:bodyPr wrap="square" lIns="0" rIns="0" tIns="0" bIns="0" anchor="t">
+            <a:spAutoFit/>
+          </a:bodyPr>
+          <a:lstStyle/>
+          <a:p>
+            <a:pPr algn="l">
+              <a:lnSpc>
+                <a:spcPts val="913"/>
+              </a:lnSpc>
+            </a:pPr>
+            <a:r>
+              <a:rPr sz="630" b="0">
                 <a:solidFill>
                   <a:srgbClr val="FFFFFF"/>
                 </a:solidFill>
@@ -3945,43 +3585,14 @@
       <p:grpSpPr/>
       <p:sp>
         <p:nvSpPr>
-          <p:cNvPr id="2" name="Rectangle 1"/>
-          <p:cNvSpPr/>
-          <p:nvPr/>
-        </p:nvSpPr>
-        <p:spPr>
-          <a:xfrm>
-            <a:off x="252000" y="540000"/>
-            <a:ext cx="28800" cy="720000"/>
-          </a:xfrm>
-          <a:prstGeom prst="rect">
-            <a:avLst/>
-          </a:prstGeom>
-          <a:solidFill>
-            <a:srgbClr val="6D7695"/>
-          </a:solidFill>
-          <a:ln>
-            <a:noFill/>
-          </a:ln>
-        </p:spPr>
-        <p:txBody>
-          <a:bodyPr rtlCol="0" anchor="ctr"/>
-          <a:lstStyle/>
-          <a:p>
-            <a:pPr algn="ctr"/>
-          </a:p>
-        </p:txBody>
-      </p:sp>
-      <p:sp>
-        <p:nvSpPr>
-          <p:cNvPr id="3" name="텍스트"/>
+          <p:cNvPr id="2" name="텍스트"/>
           <p:cNvSpPr txBox="1"/>
           <p:nvPr/>
         </p:nvSpPr>
         <p:spPr>
           <a:xfrm>
-            <a:off x="424800" y="612000"/>
-            <a:ext cx="2160000" cy="648000"/>
+            <a:off x="252000" y="223200"/>
+            <a:ext cx="1080000" cy="99061"/>
           </a:xfrm>
           <a:prstGeom prst="rect">
             <a:avLst/>
@@ -3996,32 +3607,154 @@
           <a:p>
             <a:pPr algn="l">
               <a:lnSpc>
-                <a:spcPts val="1812"/>
+                <a:spcPts val="754"/>
               </a:lnSpc>
             </a:pPr>
             <a:r>
-              <a:rPr sz="1250" b="1">
+              <a:rPr sz="520" b="1" spc="240">
+                <a:solidFill>
+                  <a:srgbClr val="A3A9B5"/>
+                </a:solidFill>
+                <a:latin typeface="맑은 고딕"/>
+                <a:ea typeface="맑은 고딕"/>
+              </a:rPr>
+              <a:t>상담 분야</a:t>
+            </a:r>
+          </a:p>
+        </p:txBody>
+      </p:sp>
+      <p:cxnSp>
+        <p:nvCxnSpPr>
+          <p:cNvPr id="3" name="Connector 2"/>
+          <p:cNvCxnSpPr/>
+          <p:nvPr/>
+        </p:nvCxnSpPr>
+        <p:spPr>
+          <a:xfrm>
+            <a:off x="252000" y="388800"/>
+            <a:ext cx="2736000" cy="0"/>
+          </a:xfrm>
+          <a:prstGeom prst="line">
+            <a:avLst/>
+          </a:prstGeom>
+          <a:ln w="3600">
+            <a:solidFill>
+              <a:srgbClr val="2A2F38"/>
+            </a:solidFill>
+          </a:ln>
+        </p:spPr>
+      </p:cxnSp>
+      <p:sp>
+        <p:nvSpPr>
+          <p:cNvPr id="4" name="텍스트"/>
+          <p:cNvSpPr txBox="1"/>
+          <p:nvPr/>
+        </p:nvSpPr>
+        <p:spPr>
+          <a:xfrm>
+            <a:off x="252000" y="468000"/>
+            <a:ext cx="216000" cy="99061"/>
+          </a:xfrm>
+          <a:prstGeom prst="rect">
+            <a:avLst/>
+          </a:prstGeom>
+          <a:noFill/>
+        </p:spPr>
+        <p:txBody>
+          <a:bodyPr wrap="square" lIns="0" rIns="0" tIns="0" bIns="0" anchor="t">
+            <a:spAutoFit/>
+          </a:bodyPr>
+          <a:lstStyle/>
+          <a:p>
+            <a:pPr algn="l">
+              <a:lnSpc>
+                <a:spcPts val="754"/>
+              </a:lnSpc>
+            </a:pPr>
+            <a:r>
+              <a:rPr sz="520" b="1" spc="100">
+                <a:solidFill>
+                  <a:srgbClr val="6D7695"/>
+                </a:solidFill>
+                <a:latin typeface="맑은 고딕"/>
+                <a:ea typeface="맑은 고딕"/>
+              </a:rPr>
+              <a:t>01</a:t>
+            </a:r>
+          </a:p>
+        </p:txBody>
+      </p:sp>
+      <p:sp>
+        <p:nvSpPr>
+          <p:cNvPr id="5" name="텍스트"/>
+          <p:cNvSpPr txBox="1"/>
+          <p:nvPr/>
+        </p:nvSpPr>
+        <p:spPr>
+          <a:xfrm>
+            <a:off x="475200" y="457200"/>
+            <a:ext cx="1152000" cy="140971"/>
+          </a:xfrm>
+          <a:prstGeom prst="rect">
+            <a:avLst/>
+          </a:prstGeom>
+          <a:noFill/>
+        </p:spPr>
+        <p:txBody>
+          <a:bodyPr wrap="square" lIns="0" rIns="0" tIns="0" bIns="0" anchor="t">
+            <a:spAutoFit/>
+          </a:bodyPr>
+          <a:lstStyle/>
+          <a:p>
+            <a:pPr algn="l">
+              <a:lnSpc>
+                <a:spcPts val="1073"/>
+              </a:lnSpc>
+            </a:pPr>
+            <a:r>
+              <a:rPr sz="740" b="0">
                 <a:solidFill>
                   <a:srgbClr val="FFFFFF"/>
                 </a:solidFill>
                 <a:latin typeface="맑은 고딕"/>
                 <a:ea typeface="맑은 고딕"/>
               </a:rPr>
-              <a:t>약속은 가볍게 하지 않습니다</a:t>
-            </a:r>
-          </a:p>
-        </p:txBody>
-      </p:sp>
-      <p:sp>
-        <p:nvSpPr>
-          <p:cNvPr id="4" name="텍스트"/>
+              <a:t>가입 점검</a:t>
+            </a:r>
+          </a:p>
+        </p:txBody>
+      </p:sp>
+      <p:cxnSp>
+        <p:nvCxnSpPr>
+          <p:cNvPr id="6" name="Connector 5"/>
+          <p:cNvCxnSpPr/>
+          <p:nvPr/>
+        </p:nvCxnSpPr>
+        <p:spPr>
+          <a:xfrm>
+            <a:off x="252000" y="691200"/>
+            <a:ext cx="1296000" cy="0"/>
+          </a:xfrm>
+          <a:prstGeom prst="line">
+            <a:avLst/>
+          </a:prstGeom>
+          <a:ln w="3600">
+            <a:solidFill>
+              <a:srgbClr val="2A2F38"/>
+            </a:solidFill>
+          </a:ln>
+        </p:spPr>
+      </p:cxnSp>
+      <p:sp>
+        <p:nvSpPr>
+          <p:cNvPr id="7" name="텍스트"/>
           <p:cNvSpPr txBox="1"/>
           <p:nvPr/>
         </p:nvSpPr>
         <p:spPr>
           <a:xfrm>
-            <a:off x="424800" y="1512000"/>
-            <a:ext cx="1800000" cy="123826"/>
+            <a:off x="1656000" y="468000"/>
+            <a:ext cx="216000" cy="99061"/>
           </a:xfrm>
           <a:prstGeom prst="rect">
             <a:avLst/>
@@ -4036,18 +3769,361 @@
           <a:p>
             <a:pPr algn="l">
               <a:lnSpc>
-                <a:spcPts val="942"/>
+                <a:spcPts val="754"/>
               </a:lnSpc>
             </a:pPr>
             <a:r>
-              <a:rPr sz="650" b="1" spc="200">
+              <a:rPr sz="520" b="1" spc="100">
+                <a:solidFill>
+                  <a:srgbClr val="6D7695"/>
+                </a:solidFill>
+                <a:latin typeface="맑은 고딕"/>
+                <a:ea typeface="맑은 고딕"/>
+              </a:rPr>
+              <a:t>02</a:t>
+            </a:r>
+          </a:p>
+        </p:txBody>
+      </p:sp>
+      <p:sp>
+        <p:nvSpPr>
+          <p:cNvPr id="8" name="텍스트"/>
+          <p:cNvSpPr txBox="1"/>
+          <p:nvPr/>
+        </p:nvSpPr>
+        <p:spPr>
+          <a:xfrm>
+            <a:off x="1879200" y="457200"/>
+            <a:ext cx="1152000" cy="140971"/>
+          </a:xfrm>
+          <a:prstGeom prst="rect">
+            <a:avLst/>
+          </a:prstGeom>
+          <a:noFill/>
+        </p:spPr>
+        <p:txBody>
+          <a:bodyPr wrap="square" lIns="0" rIns="0" tIns="0" bIns="0" anchor="t">
+            <a:spAutoFit/>
+          </a:bodyPr>
+          <a:lstStyle/>
+          <a:p>
+            <a:pPr algn="l">
+              <a:lnSpc>
+                <a:spcPts val="1073"/>
+              </a:lnSpc>
+            </a:pPr>
+            <a:r>
+              <a:rPr sz="740" b="0">
+                <a:solidFill>
+                  <a:srgbClr val="FFFFFF"/>
+                </a:solidFill>
+                <a:latin typeface="맑은 고딕"/>
+                <a:ea typeface="맑은 고딕"/>
+              </a:rPr>
+              <a:t>상속 · 증여</a:t>
+            </a:r>
+          </a:p>
+        </p:txBody>
+      </p:sp>
+      <p:cxnSp>
+        <p:nvCxnSpPr>
+          <p:cNvPr id="9" name="Connector 8"/>
+          <p:cNvCxnSpPr/>
+          <p:nvPr/>
+        </p:nvCxnSpPr>
+        <p:spPr>
+          <a:xfrm>
+            <a:off x="1656000" y="691200"/>
+            <a:ext cx="1296000" cy="0"/>
+          </a:xfrm>
+          <a:prstGeom prst="line">
+            <a:avLst/>
+          </a:prstGeom>
+          <a:ln w="3600">
+            <a:solidFill>
+              <a:srgbClr val="2A2F38"/>
+            </a:solidFill>
+          </a:ln>
+        </p:spPr>
+      </p:cxnSp>
+      <p:sp>
+        <p:nvSpPr>
+          <p:cNvPr id="10" name="텍스트"/>
+          <p:cNvSpPr txBox="1"/>
+          <p:nvPr/>
+        </p:nvSpPr>
+        <p:spPr>
+          <a:xfrm>
+            <a:off x="252000" y="813600"/>
+            <a:ext cx="216000" cy="99061"/>
+          </a:xfrm>
+          <a:prstGeom prst="rect">
+            <a:avLst/>
+          </a:prstGeom>
+          <a:noFill/>
+        </p:spPr>
+        <p:txBody>
+          <a:bodyPr wrap="square" lIns="0" rIns="0" tIns="0" bIns="0" anchor="t">
+            <a:spAutoFit/>
+          </a:bodyPr>
+          <a:lstStyle/>
+          <a:p>
+            <a:pPr algn="l">
+              <a:lnSpc>
+                <a:spcPts val="754"/>
+              </a:lnSpc>
+            </a:pPr>
+            <a:r>
+              <a:rPr sz="520" b="1" spc="100">
+                <a:solidFill>
+                  <a:srgbClr val="6D7695"/>
+                </a:solidFill>
+                <a:latin typeface="맑은 고딕"/>
+                <a:ea typeface="맑은 고딕"/>
+              </a:rPr>
+              <a:t>03</a:t>
+            </a:r>
+          </a:p>
+        </p:txBody>
+      </p:sp>
+      <p:sp>
+        <p:nvSpPr>
+          <p:cNvPr id="11" name="텍스트"/>
+          <p:cNvSpPr txBox="1"/>
+          <p:nvPr/>
+        </p:nvSpPr>
+        <p:spPr>
+          <a:xfrm>
+            <a:off x="475200" y="802800"/>
+            <a:ext cx="1152000" cy="140971"/>
+          </a:xfrm>
+          <a:prstGeom prst="rect">
+            <a:avLst/>
+          </a:prstGeom>
+          <a:noFill/>
+        </p:spPr>
+        <p:txBody>
+          <a:bodyPr wrap="square" lIns="0" rIns="0" tIns="0" bIns="0" anchor="t">
+            <a:spAutoFit/>
+          </a:bodyPr>
+          <a:lstStyle/>
+          <a:p>
+            <a:pPr algn="l">
+              <a:lnSpc>
+                <a:spcPts val="1073"/>
+              </a:lnSpc>
+            </a:pPr>
+            <a:r>
+              <a:rPr sz="740" b="0">
+                <a:solidFill>
+                  <a:srgbClr val="FFFFFF"/>
+                </a:solidFill>
+                <a:latin typeface="맑은 고딕"/>
+                <a:ea typeface="맑은 고딕"/>
+              </a:rPr>
+              <a:t>법인 상담</a:t>
+            </a:r>
+          </a:p>
+        </p:txBody>
+      </p:sp>
+      <p:cxnSp>
+        <p:nvCxnSpPr>
+          <p:cNvPr id="12" name="Connector 11"/>
+          <p:cNvCxnSpPr/>
+          <p:nvPr/>
+        </p:nvCxnSpPr>
+        <p:spPr>
+          <a:xfrm>
+            <a:off x="252000" y="1036800"/>
+            <a:ext cx="1296000" cy="0"/>
+          </a:xfrm>
+          <a:prstGeom prst="line">
+            <a:avLst/>
+          </a:prstGeom>
+          <a:ln w="3600">
+            <a:solidFill>
+              <a:srgbClr val="2A2F38"/>
+            </a:solidFill>
+          </a:ln>
+        </p:spPr>
+      </p:cxnSp>
+      <p:sp>
+        <p:nvSpPr>
+          <p:cNvPr id="13" name="텍스트"/>
+          <p:cNvSpPr txBox="1"/>
+          <p:nvPr/>
+        </p:nvSpPr>
+        <p:spPr>
+          <a:xfrm>
+            <a:off x="1656000" y="813600"/>
+            <a:ext cx="216000" cy="99061"/>
+          </a:xfrm>
+          <a:prstGeom prst="rect">
+            <a:avLst/>
+          </a:prstGeom>
+          <a:noFill/>
+        </p:spPr>
+        <p:txBody>
+          <a:bodyPr wrap="square" lIns="0" rIns="0" tIns="0" bIns="0" anchor="t">
+            <a:spAutoFit/>
+          </a:bodyPr>
+          <a:lstStyle/>
+          <a:p>
+            <a:pPr algn="l">
+              <a:lnSpc>
+                <a:spcPts val="754"/>
+              </a:lnSpc>
+            </a:pPr>
+            <a:r>
+              <a:rPr sz="520" b="1" spc="100">
+                <a:solidFill>
+                  <a:srgbClr val="6D7695"/>
+                </a:solidFill>
+                <a:latin typeface="맑은 고딕"/>
+                <a:ea typeface="맑은 고딕"/>
+              </a:rPr>
+              <a:t>04</a:t>
+            </a:r>
+          </a:p>
+        </p:txBody>
+      </p:sp>
+      <p:sp>
+        <p:nvSpPr>
+          <p:cNvPr id="14" name="텍스트"/>
+          <p:cNvSpPr txBox="1"/>
+          <p:nvPr/>
+        </p:nvSpPr>
+        <p:spPr>
+          <a:xfrm>
+            <a:off x="1879200" y="802800"/>
+            <a:ext cx="1152000" cy="140971"/>
+          </a:xfrm>
+          <a:prstGeom prst="rect">
+            <a:avLst/>
+          </a:prstGeom>
+          <a:noFill/>
+        </p:spPr>
+        <p:txBody>
+          <a:bodyPr wrap="square" lIns="0" rIns="0" tIns="0" bIns="0" anchor="t">
+            <a:spAutoFit/>
+          </a:bodyPr>
+          <a:lstStyle/>
+          <a:p>
+            <a:pPr algn="l">
+              <a:lnSpc>
+                <a:spcPts val="1073"/>
+              </a:lnSpc>
+            </a:pPr>
+            <a:r>
+              <a:rPr sz="740" b="0">
+                <a:solidFill>
+                  <a:srgbClr val="FFFFFF"/>
+                </a:solidFill>
+                <a:latin typeface="맑은 고딕"/>
+                <a:ea typeface="맑은 고딕"/>
+              </a:rPr>
+              <a:t>사업자 상담</a:t>
+            </a:r>
+          </a:p>
+        </p:txBody>
+      </p:sp>
+      <p:cxnSp>
+        <p:nvCxnSpPr>
+          <p:cNvPr id="15" name="Connector 14"/>
+          <p:cNvCxnSpPr/>
+          <p:nvPr/>
+        </p:nvCxnSpPr>
+        <p:spPr>
+          <a:xfrm>
+            <a:off x="1656000" y="1036800"/>
+            <a:ext cx="1296000" cy="0"/>
+          </a:xfrm>
+          <a:prstGeom prst="line">
+            <a:avLst/>
+          </a:prstGeom>
+          <a:ln w="3600">
+            <a:solidFill>
+              <a:srgbClr val="2A2F38"/>
+            </a:solidFill>
+          </a:ln>
+        </p:spPr>
+      </p:cxnSp>
+      <p:sp>
+        <p:nvSpPr>
+          <p:cNvPr id="16" name="텍스트"/>
+          <p:cNvSpPr txBox="1"/>
+          <p:nvPr/>
+        </p:nvSpPr>
+        <p:spPr>
+          <a:xfrm>
+            <a:off x="252000" y="1569600"/>
+            <a:ext cx="1368000" cy="114301"/>
+          </a:xfrm>
+          <a:prstGeom prst="rect">
+            <a:avLst/>
+          </a:prstGeom>
+          <a:noFill/>
+        </p:spPr>
+        <p:txBody>
+          <a:bodyPr wrap="square" lIns="0" rIns="0" tIns="0" bIns="0" anchor="t">
+            <a:spAutoFit/>
+          </a:bodyPr>
+          <a:lstStyle/>
+          <a:p>
+            <a:pPr algn="l">
+              <a:lnSpc>
+                <a:spcPts val="869"/>
+              </a:lnSpc>
+            </a:pPr>
+            <a:r>
+              <a:rPr sz="600" b="0">
                 <a:solidFill>
                   <a:srgbClr val="A3A9B5"/>
                 </a:solidFill>
                 <a:latin typeface="맑은 고딕"/>
                 <a:ea typeface="맑은 고딕"/>
               </a:rPr>
-              <a:t>회사 · 사무소 이름</a:t>
+              <a:t>평일 10:00 – 19:00</a:t>
+            </a:r>
+          </a:p>
+        </p:txBody>
+      </p:sp>
+      <p:sp>
+        <p:nvSpPr>
+          <p:cNvPr id="17" name="텍스트"/>
+          <p:cNvSpPr txBox="1"/>
+          <p:nvPr/>
+        </p:nvSpPr>
+        <p:spPr>
+          <a:xfrm>
+            <a:off x="1620000" y="1569600"/>
+            <a:ext cx="1368000" cy="114301"/>
+          </a:xfrm>
+          <a:prstGeom prst="rect">
+            <a:avLst/>
+          </a:prstGeom>
+          <a:noFill/>
+        </p:spPr>
+        <p:txBody>
+          <a:bodyPr wrap="square" lIns="0" rIns="0" tIns="0" bIns="0" anchor="t">
+            <a:spAutoFit/>
+          </a:bodyPr>
+          <a:lstStyle/>
+          <a:p>
+            <a:pPr algn="r">
+              <a:lnSpc>
+                <a:spcPts val="869"/>
+              </a:lnSpc>
+            </a:pPr>
+            <a:r>
+              <a:rPr sz="600" b="0">
+                <a:solidFill>
+                  <a:srgbClr val="A3A9B5"/>
+                </a:solidFill>
+                <a:latin typeface="맑은 고딕"/>
+                <a:ea typeface="맑은 고딕"/>
+              </a:rPr>
+              <a:t>@아이디</a:t>
             </a:r>
           </a:p>
         </p:txBody>
